--- a/Deliverables/Phase2/Sprint2/DESOFS 2026 - wed_nap_1.pptx
+++ b/Deliverables/Phase2/Sprint2/DESOFS 2026 - wed_nap_1.pptx
@@ -11026,7 +11026,7 @@
         <p:spPr>
           <a:xfrm rot="0">
             <a:off x="1028700" y="2632710"/>
-            <a:ext cx="7342398" cy="6927215"/>
+            <a:ext cx="7342398" cy="6574790"/>
           </a:xfrm>
           <a:prstGeom prst="rect">
             <a:avLst/>
@@ -11277,28 +11277,7 @@
                 <a:cs typeface="Open Sauce"/>
                 <a:sym typeface="Open Sauce"/>
               </a:rPr>
-              <a:t>Pedido de reembolso</a:t>
-            </a:r>
-          </a:p>
-          <a:p>
-            <a:pPr algn="l" marL="431801" indent="-215900" lvl="1">
-              <a:lnSpc>
-                <a:spcPts val="2800"/>
-              </a:lnSpc>
-              <a:buFont typeface="Arial"/>
-              <a:buChar char="•"/>
-            </a:pPr>
-            <a:r>
-              <a:rPr lang="en-US" sz="2000">
-                <a:solidFill>
-                  <a:srgbClr val="331B0D"/>
-                </a:solidFill>
-                <a:latin typeface="Open Sauce"/>
-                <a:ea typeface="Open Sauce"/>
-                <a:cs typeface="Open Sauce"/>
-                <a:sym typeface="Open Sauce"/>
-              </a:rPr>
-              <a:t>Gestão de pedidos de reembolso</a:t>
+              <a:t>Pedido e gestão de reembolsos</a:t>
             </a:r>
           </a:p>
           <a:p>
@@ -11345,7 +11324,7 @@
                 <a:cs typeface="Open Sauce Bold"/>
                 <a:sym typeface="Open Sauce Bold"/>
               </a:rPr>
-              <a:t>Requesitos de Segurança</a:t>
+              <a:t>Requisitos de Segurança</a:t>
             </a:r>
           </a:p>
           <a:p>
@@ -11366,7 +11345,7 @@
                 <a:cs typeface="Open Sauce"/>
                 <a:sym typeface="Open Sauce"/>
               </a:rPr>
-              <a:t>Autenticação OAuth2/OpenID Connect (Auth0)</a:t>
+              <a:t>Autenticação via Auth0</a:t>
             </a:r>
           </a:p>
           <a:p>
@@ -11441,16 +11420,16 @@
               <a:buChar char="•"/>
             </a:pPr>
             <a:r>
-              <a:rPr lang="en-US" sz="2000" i="true">
-                <a:solidFill>
-                  <a:srgbClr val="331B0D"/>
-                </a:solidFill>
-                <a:latin typeface="Open Sauce Italics"/>
-                <a:ea typeface="Open Sauce Italics"/>
-                <a:cs typeface="Open Sauce Italics"/>
-                <a:sym typeface="Open Sauce Italics"/>
-              </a:rPr>
-              <a:t>Input Validation</a:t>
+              <a:rPr lang="en-US" sz="2000">
+                <a:solidFill>
+                  <a:srgbClr val="331B0D"/>
+                </a:solidFill>
+                <a:latin typeface="Open Sauce"/>
+                <a:ea typeface="Open Sauce"/>
+                <a:cs typeface="Open Sauce"/>
+                <a:sym typeface="Open Sauce"/>
+              </a:rPr>
+              <a:t>Validação e sanitização dos inputs</a:t>
             </a:r>
           </a:p>
           <a:p>
@@ -13193,7 +13172,7 @@
         <p:spPr>
           <a:xfrm rot="0">
             <a:off x="969441" y="6261188"/>
-            <a:ext cx="4355740" cy="3521075"/>
+            <a:ext cx="4708443" cy="2111375"/>
           </a:xfrm>
           <a:prstGeom prst="rect">
             <a:avLst/>
@@ -13222,7 +13201,7 @@
                 <a:cs typeface="Open Sauce"/>
                 <a:sym typeface="Open Sauce"/>
               </a:rPr>
-              <a:t>Auth0 (</a:t>
+              <a:t>Auth0 como IdP (</a:t>
             </a:r>
             <a:r>
               <a:rPr lang="en-US" sz="2000" i="true">
@@ -13255,8 +13234,17 @@
                 <a:cs typeface="Open Sauce"/>
                 <a:sym typeface="Open Sauce"/>
               </a:rPr>
-              <a:t>OAuth2 / OpenID </a:t>
-            </a:r>
+              <a:t>Validacao de JWT RS256 via JWKS (issuer, audience e expiração)</a:t>
+            </a:r>
+          </a:p>
+          <a:p>
+            <a:pPr algn="l" marL="431801" indent="-215900" lvl="1">
+              <a:lnSpc>
+                <a:spcPts val="2800"/>
+              </a:lnSpc>
+              <a:buFont typeface="Arial"/>
+              <a:buChar char="•"/>
+            </a:pPr>
             <a:r>
               <a:rPr lang="en-US" sz="2000" i="true">
                 <a:solidFill>
@@ -13267,163 +13255,7 @@
                 <a:cs typeface="Open Sauce Italics"/>
                 <a:sym typeface="Open Sauce Italics"/>
               </a:rPr>
-              <a:t>Connect</a:t>
-            </a:r>
-          </a:p>
-          <a:p>
-            <a:pPr algn="l" marL="431801" indent="-215900" lvl="1">
-              <a:lnSpc>
-                <a:spcPts val="2800"/>
-              </a:lnSpc>
-              <a:buFont typeface="Arial"/>
-              <a:buChar char="•"/>
-            </a:pPr>
-            <a:r>
-              <a:rPr lang="en-US" sz="2000">
-                <a:solidFill>
-                  <a:srgbClr val="331B0D"/>
-                </a:solidFill>
-                <a:latin typeface="Open Sauce"/>
-                <a:ea typeface="Open Sauce"/>
-                <a:cs typeface="Open Sauce"/>
-                <a:sym typeface="Open Sauce"/>
-              </a:rPr>
-              <a:t>JWT assinado com RS256 + validação de issuer, audience e expiração</a:t>
-            </a:r>
-          </a:p>
-          <a:p>
-            <a:pPr algn="l" marL="431801" indent="-215900" lvl="1">
-              <a:lnSpc>
-                <a:spcPts val="2800"/>
-              </a:lnSpc>
-              <a:buFont typeface="Arial"/>
-              <a:buChar char="•"/>
-            </a:pPr>
-            <a:r>
-              <a:rPr lang="en-US" sz="2000" i="true">
-                <a:solidFill>
-                  <a:srgbClr val="331B0D"/>
-                </a:solidFill>
-                <a:latin typeface="Open Sauce Italics"/>
-                <a:ea typeface="Open Sauce Italics"/>
-                <a:cs typeface="Open Sauce Italics"/>
-                <a:sym typeface="Open Sauce Italics"/>
-              </a:rPr>
               <a:t>Refresh Token Rotation</a:t>
-            </a:r>
-          </a:p>
-          <a:p>
-            <a:pPr algn="l" marL="431801" indent="-215900" lvl="1">
-              <a:lnSpc>
-                <a:spcPts val="2800"/>
-              </a:lnSpc>
-              <a:buFont typeface="Arial"/>
-              <a:buChar char="•"/>
-            </a:pPr>
-            <a:r>
-              <a:rPr lang="en-US" sz="2000">
-                <a:solidFill>
-                  <a:srgbClr val="331B0D"/>
-                </a:solidFill>
-                <a:latin typeface="Open Sauce"/>
-                <a:ea typeface="Open Sauce"/>
-                <a:cs typeface="Open Sauce"/>
-                <a:sym typeface="Open Sauce"/>
-              </a:rPr>
-              <a:t>RBAC (</a:t>
-            </a:r>
-            <a:r>
-              <a:rPr lang="en-US" sz="2000" i="true">
-                <a:solidFill>
-                  <a:srgbClr val="331B0D"/>
-                </a:solidFill>
-                <a:latin typeface="Open Sauce Italics"/>
-                <a:ea typeface="Open Sauce Italics"/>
-                <a:cs typeface="Open Sauce Italics"/>
-                <a:sym typeface="Open Sauce Italics"/>
-              </a:rPr>
-              <a:t>Customer</a:t>
-            </a:r>
-            <a:r>
-              <a:rPr lang="en-US" sz="2000">
-                <a:solidFill>
-                  <a:srgbClr val="331B0D"/>
-                </a:solidFill>
-                <a:latin typeface="Open Sauce"/>
-                <a:ea typeface="Open Sauce"/>
-                <a:cs typeface="Open Sauce"/>
-                <a:sym typeface="Open Sauce"/>
-              </a:rPr>
-              <a:t>, </a:t>
-            </a:r>
-            <a:r>
-              <a:rPr lang="en-US" sz="2000" i="true">
-                <a:solidFill>
-                  <a:srgbClr val="331B0D"/>
-                </a:solidFill>
-                <a:latin typeface="Open Sauce Italics"/>
-                <a:ea typeface="Open Sauce Italics"/>
-                <a:cs typeface="Open Sauce Italics"/>
-                <a:sym typeface="Open Sauce Italics"/>
-              </a:rPr>
-              <a:t>Support</a:t>
-            </a:r>
-            <a:r>
-              <a:rPr lang="en-US" sz="2000">
-                <a:solidFill>
-                  <a:srgbClr val="331B0D"/>
-                </a:solidFill>
-                <a:latin typeface="Open Sauce"/>
-                <a:ea typeface="Open Sauce"/>
-                <a:cs typeface="Open Sauce"/>
-                <a:sym typeface="Open Sauce"/>
-              </a:rPr>
-              <a:t>, </a:t>
-            </a:r>
-            <a:r>
-              <a:rPr lang="en-US" sz="2000" i="true">
-                <a:solidFill>
-                  <a:srgbClr val="331B0D"/>
-                </a:solidFill>
-                <a:latin typeface="Open Sauce Italics"/>
-                <a:ea typeface="Open Sauce Italics"/>
-                <a:cs typeface="Open Sauce Italics"/>
-                <a:sym typeface="Open Sauce Italics"/>
-              </a:rPr>
-              <a:t>Admin</a:t>
-            </a:r>
-            <a:r>
-              <a:rPr lang="en-US" sz="2000">
-                <a:solidFill>
-                  <a:srgbClr val="331B0D"/>
-                </a:solidFill>
-                <a:latin typeface="Open Sauce"/>
-                <a:ea typeface="Open Sauce"/>
-                <a:cs typeface="Open Sauce"/>
-                <a:sym typeface="Open Sauce"/>
-              </a:rPr>
-              <a:t>)</a:t>
-            </a:r>
-          </a:p>
-          <a:p>
-            <a:pPr algn="l" marL="431801" indent="-215900" lvl="1">
-              <a:lnSpc>
-                <a:spcPts val="2800"/>
-              </a:lnSpc>
-              <a:buFont typeface="Arial"/>
-              <a:buChar char="•"/>
-            </a:pPr>
-            <a:r>
-              <a:rPr lang="en-US" sz="2000" i="true">
-                <a:solidFill>
-                  <a:srgbClr val="331B0D"/>
-                </a:solidFill>
-                <a:latin typeface="Open Sauce Italics"/>
-                <a:ea typeface="Open Sauce Italics"/>
-                <a:cs typeface="Open Sauce Italics"/>
-                <a:sym typeface="Open Sauce Italics"/>
-              </a:rPr>
-              <a:t>Role Guards</a:t>
             </a:r>
           </a:p>
           <a:p>
@@ -13447,74 +13279,10 @@
                 <a:cs typeface="Open Sauce"/>
                 <a:sym typeface="Open Sauce"/>
               </a:rPr>
-              <a:t>Princípio do menor privilégio</a:t>
-            </a:r>
-          </a:p>
-        </p:txBody>
-      </p:sp>
-      <p:sp>
-        <p:nvSpPr>
-          <p:cNvPr name="TextBox 21" id="21"/>
-          <p:cNvSpPr txBox="true"/>
-          <p:nvPr/>
-        </p:nvSpPr>
-        <p:spPr>
-          <a:xfrm rot="0">
-            <a:off x="5877909" y="6261188"/>
-            <a:ext cx="3544362" cy="3337560"/>
-          </a:xfrm>
-          <a:prstGeom prst="rect">
-            <a:avLst/>
-          </a:prstGeom>
-        </p:spPr>
-        <p:txBody>
-          <a:bodyPr anchor="t" rtlCol="false" tIns="0" lIns="0" bIns="0" rIns="0">
-            <a:spAutoFit/>
-          </a:bodyPr>
-          <a:lstStyle/>
-          <a:p>
-            <a:pPr algn="l" marL="453390" indent="-226695" lvl="1">
-              <a:lnSpc>
-                <a:spcPts val="2940"/>
-              </a:lnSpc>
-              <a:buFont typeface="Arial"/>
-              <a:buChar char="•"/>
-            </a:pPr>
-            <a:r>
-              <a:rPr lang="en-US" sz="2100">
-                <a:solidFill>
-                  <a:srgbClr val="331B0D"/>
-                </a:solidFill>
-                <a:latin typeface="Open Sauce"/>
-                <a:ea typeface="Open Sauce"/>
-                <a:cs typeface="Open Sauce"/>
-                <a:sym typeface="Open Sauce"/>
-              </a:rPr>
-              <a:t>DTOs (controlo de exposição da API)</a:t>
-            </a:r>
-          </a:p>
-          <a:p>
-            <a:pPr algn="l" marL="453390" indent="-226695" lvl="1">
-              <a:lnSpc>
-                <a:spcPts val="2940"/>
-              </a:lnSpc>
-              <a:buFont typeface="Arial"/>
-              <a:buChar char="•"/>
-            </a:pPr>
-            <a:r>
-              <a:rPr lang="en-US" sz="2100">
-                <a:solidFill>
-                  <a:srgbClr val="331B0D"/>
-                </a:solidFill>
-                <a:latin typeface="Open Sauce"/>
-                <a:ea typeface="Open Sauce"/>
-                <a:cs typeface="Open Sauce"/>
-                <a:sym typeface="Open Sauce"/>
-              </a:rPr>
-              <a:t>Validação de</a:t>
-            </a:r>
-            <a:r>
-              <a:rPr lang="en-US" sz="2100" i="true">
+              <a:t>RBAC (</a:t>
+            </a:r>
+            <a:r>
+              <a:rPr lang="en-US" sz="2000" i="true">
                 <a:solidFill>
                   <a:srgbClr val="331B0D"/>
                 </a:solidFill>
@@ -13523,7 +13291,110 @@
                 <a:cs typeface="Open Sauce Italics"/>
                 <a:sym typeface="Open Sauce Italics"/>
               </a:rPr>
-              <a:t> inputs</a:t>
+              <a:t>Customer</a:t>
+            </a:r>
+            <a:r>
+              <a:rPr lang="en-US" sz="2000">
+                <a:solidFill>
+                  <a:srgbClr val="331B0D"/>
+                </a:solidFill>
+                <a:latin typeface="Open Sauce"/>
+                <a:ea typeface="Open Sauce"/>
+                <a:cs typeface="Open Sauce"/>
+                <a:sym typeface="Open Sauce"/>
+              </a:rPr>
+              <a:t>, </a:t>
+            </a:r>
+            <a:r>
+              <a:rPr lang="en-US" sz="2000" i="true">
+                <a:solidFill>
+                  <a:srgbClr val="331B0D"/>
+                </a:solidFill>
+                <a:latin typeface="Open Sauce Italics"/>
+                <a:ea typeface="Open Sauce Italics"/>
+                <a:cs typeface="Open Sauce Italics"/>
+                <a:sym typeface="Open Sauce Italics"/>
+              </a:rPr>
+              <a:t>Support</a:t>
+            </a:r>
+            <a:r>
+              <a:rPr lang="en-US" sz="2000">
+                <a:solidFill>
+                  <a:srgbClr val="331B0D"/>
+                </a:solidFill>
+                <a:latin typeface="Open Sauce"/>
+                <a:ea typeface="Open Sauce"/>
+                <a:cs typeface="Open Sauce"/>
+                <a:sym typeface="Open Sauce"/>
+              </a:rPr>
+              <a:t>, </a:t>
+            </a:r>
+            <a:r>
+              <a:rPr lang="en-US" sz="2000" i="true">
+                <a:solidFill>
+                  <a:srgbClr val="331B0D"/>
+                </a:solidFill>
+                <a:latin typeface="Open Sauce Italics"/>
+                <a:ea typeface="Open Sauce Italics"/>
+                <a:cs typeface="Open Sauce Italics"/>
+                <a:sym typeface="Open Sauce Italics"/>
+              </a:rPr>
+              <a:t>Admin</a:t>
+            </a:r>
+            <a:r>
+              <a:rPr lang="en-US" sz="2000">
+                <a:solidFill>
+                  <a:srgbClr val="331B0D"/>
+                </a:solidFill>
+                <a:latin typeface="Open Sauce"/>
+                <a:ea typeface="Open Sauce"/>
+                <a:cs typeface="Open Sauce"/>
+                <a:sym typeface="Open Sauce"/>
+              </a:rPr>
+              <a:t>) via Role Guards</a:t>
+            </a:r>
+          </a:p>
+        </p:txBody>
+      </p:sp>
+      <p:sp>
+        <p:nvSpPr>
+          <p:cNvPr name="TextBox 21" id="21"/>
+          <p:cNvSpPr txBox="true"/>
+          <p:nvPr/>
+        </p:nvSpPr>
+        <p:spPr>
+          <a:xfrm rot="0">
+            <a:off x="5877909" y="6261188"/>
+            <a:ext cx="3897065" cy="3709035"/>
+          </a:xfrm>
+          <a:prstGeom prst="rect">
+            <a:avLst/>
+          </a:prstGeom>
+        </p:spPr>
+        <p:txBody>
+          <a:bodyPr anchor="t" rtlCol="false" tIns="0" lIns="0" bIns="0" rIns="0">
+            <a:spAutoFit/>
+          </a:bodyPr>
+          <a:lstStyle/>
+          <a:p>
+            <a:pPr algn="l" marL="453390" indent="-226695" lvl="1">
+              <a:lnSpc>
+                <a:spcPts val="2940"/>
+              </a:lnSpc>
+              <a:buFont typeface="Arial"/>
+              <a:buChar char="•"/>
+            </a:pPr>
+            <a:r>
+              <a:rPr lang="en-US" sz="2100">
+                <a:solidFill>
+                  <a:srgbClr val="331B0D"/>
+                </a:solidFill>
+                <a:latin typeface="Open Sauce"/>
+                <a:ea typeface="Open Sauce"/>
+                <a:cs typeface="Open Sauce"/>
+                <a:sym typeface="Open Sauce"/>
+              </a:rPr>
+              <a:t>DTOs (controlo de exposição da API)</a:t>
             </a:r>
           </a:p>
           <a:p>
@@ -13547,7 +13418,19 @@
                 <a:cs typeface="Open Sauce"/>
                 <a:sym typeface="Open Sauce"/>
               </a:rPr>
-              <a:t>Sani</a:t>
+              <a:t>Validação </a:t>
+            </a:r>
+            <a:r>
+              <a:rPr lang="en-US" sz="2100" i="true">
+                <a:solidFill>
+                  <a:srgbClr val="331B0D"/>
+                </a:solidFill>
+                <a:latin typeface="Open Sauce Italics"/>
+                <a:ea typeface="Open Sauce Italics"/>
+                <a:cs typeface="Open Sauce Italics"/>
+                <a:sym typeface="Open Sauce Italics"/>
+              </a:rPr>
+              <a:t>e s</a:t>
             </a:r>
             <a:r>
               <a:rPr lang="en-US" sz="2100">
@@ -13559,7 +13442,19 @@
                 <a:cs typeface="Open Sauce"/>
                 <a:sym typeface="Open Sauce"/>
               </a:rPr>
-              <a:t>tização de dados</a:t>
+              <a:t>ani</a:t>
+            </a:r>
+            <a:r>
+              <a:rPr lang="en-US" sz="2100">
+                <a:solidFill>
+                  <a:srgbClr val="331B0D"/>
+                </a:solidFill>
+                <a:latin typeface="Open Sauce"/>
+                <a:ea typeface="Open Sauce"/>
+                <a:cs typeface="Open Sauce"/>
+                <a:sym typeface="Open Sauce"/>
+              </a:rPr>
+              <a:t>tização de inputs</a:t>
             </a:r>
           </a:p>
           <a:p>
@@ -13595,7 +13490,7 @@
                 <a:cs typeface="Open Sauce Italics"/>
                 <a:sym typeface="Open Sauce Italics"/>
               </a:rPr>
-              <a:t>Path Traversal</a:t>
+              <a:t>Path Traversal e SQL Injection</a:t>
             </a:r>
           </a:p>
           <a:p>
@@ -13631,7 +13526,7 @@
                 <a:cs typeface="Open Sauce"/>
                 <a:sym typeface="Open Sauce"/>
               </a:rPr>
-              <a:t>ratamento seguro de erros</a:t>
+              <a:t>ratamento seguro de erros (sem detalhes internos nas respostas)</a:t>
             </a:r>
           </a:p>
           <a:p>
@@ -13655,7 +13550,7 @@
         <p:spPr>
           <a:xfrm rot="0">
             <a:off x="13711199" y="6198507"/>
-            <a:ext cx="3428451" cy="2223135"/>
+            <a:ext cx="4065594" cy="2594610"/>
           </a:xfrm>
           <a:prstGeom prst="rect">
             <a:avLst/>
@@ -13684,7 +13579,7 @@
                 <a:cs typeface="Open Sauce Italics"/>
                 <a:sym typeface="Open Sauce Italics"/>
               </a:rPr>
-              <a:t>Security Logging</a:t>
+              <a:t>Security Logging de eventos críticos</a:t>
             </a:r>
           </a:p>
           <a:p>
@@ -13705,7 +13600,7 @@
                 <a:cs typeface="Open Sauce Italics"/>
                 <a:sym typeface="Open Sauce Italics"/>
               </a:rPr>
-              <a:t>Audit Trails</a:t>
+              <a:t>Audit Trails persistente</a:t>
             </a:r>
           </a:p>
           <a:p>
@@ -13726,7 +13621,7 @@
                 <a:cs typeface="Open Sauce"/>
                 <a:sym typeface="Open Sauce"/>
               </a:rPr>
-              <a:t>Registo de alterações de permissões</a:t>
+              <a:t>Pipeline de SAST/DAST/SCA</a:t>
             </a:r>
           </a:p>
           <a:p>
@@ -13741,18 +13636,6 @@
               <a:buChar char="•"/>
             </a:pPr>
             <a:r>
-              <a:rPr lang="en-US" sz="2100" i="true">
-                <a:solidFill>
-                  <a:srgbClr val="331B0D"/>
-                </a:solidFill>
-                <a:latin typeface="Open Sauce Italics"/>
-                <a:ea typeface="Open Sauce Italics"/>
-                <a:cs typeface="Open Sauce Italics"/>
-                <a:sym typeface="Open Sauce Italics"/>
-              </a:rPr>
-              <a:t>Logging</a:t>
-            </a:r>
-            <a:r>
               <a:rPr lang="en-US" sz="2100">
                 <a:solidFill>
                   <a:srgbClr val="331B0D"/>
@@ -13762,7 +13645,7 @@
                 <a:cs typeface="Open Sauce"/>
                 <a:sym typeface="Open Sauce"/>
               </a:rPr>
-              <a:t> de eventos críticos</a:t>
+              <a:t>Healtcheck para detecao de falhas em runtime</a:t>
             </a:r>
           </a:p>
         </p:txBody>
@@ -13966,7 +13849,7 @@
         <p:spPr>
           <a:xfrm rot="0">
             <a:off x="9974999" y="6198507"/>
-            <a:ext cx="3183750" cy="2594610"/>
+            <a:ext cx="3537718" cy="2966085"/>
           </a:xfrm>
           <a:prstGeom prst="rect">
             <a:avLst/>
@@ -14125,6 +14008,30 @@
                 <a:sym typeface="Open Sauce"/>
               </a:rPr>
               <a:t>HTTPS/TLS</a:t>
+            </a:r>
+          </a:p>
+          <a:p>
+            <a:pPr algn="l" marL="453390" indent="-226695" lvl="1">
+              <a:lnSpc>
+                <a:spcPts val="2940"/>
+              </a:lnSpc>
+              <a:spcBef>
+                <a:spcPct val="0"/>
+              </a:spcBef>
+              <a:buFont typeface="Arial"/>
+              <a:buChar char="•"/>
+            </a:pPr>
+            <a:r>
+              <a:rPr lang="en-US" sz="2100">
+                <a:solidFill>
+                  <a:srgbClr val="331B0D"/>
+                </a:solidFill>
+                <a:latin typeface="Open Sauce"/>
+                <a:ea typeface="Open Sauce"/>
+                <a:cs typeface="Open Sauce"/>
+                <a:sym typeface="Open Sauce"/>
+              </a:rPr>
+              <a:t>Secrets apenas em variaveis de ambiente (nunca no repositório)</a:t>
             </a:r>
           </a:p>
           <a:p>
@@ -15240,7 +15147,7 @@
         <p:spPr>
           <a:xfrm rot="0">
             <a:off x="12968007" y="7039533"/>
-            <a:ext cx="3556957" cy="737235"/>
+            <a:ext cx="3763021" cy="1108710"/>
           </a:xfrm>
           <a:prstGeom prst="rect">
             <a:avLst/>
@@ -15282,18 +15189,8 @@
                 <a:cs typeface="Open Sauce"/>
                 <a:sym typeface="Open Sauce"/>
               </a:rPr>
-              <a:t>co</a:t>
-            </a:r>
-          </a:p>
-          <a:p>
-            <a:pPr algn="l" marL="0" indent="0" lvl="0">
-              <a:lnSpc>
-                <a:spcPts val="2940"/>
-              </a:lnSpc>
-              <a:spcBef>
-                <a:spcPct val="0"/>
-              </a:spcBef>
-            </a:pPr>
+              <a:t>co </a:t>
+            </a:r>
             <a:r>
               <a:rPr lang="en-US" sz="2100" strike="noStrike" u="none">
                 <a:solidFill>
@@ -15304,31 +15201,7 @@
                 <a:cs typeface="Open Sauce"/>
                 <a:sym typeface="Open Sauce"/>
               </a:rPr>
-              <a:t>e geração de relea</a:t>
-            </a:r>
-            <a:r>
-              <a:rPr lang="en-US" sz="2100" strike="noStrike" u="none">
-                <a:solidFill>
-                  <a:srgbClr val="331B0D"/>
-                </a:solidFill>
-                <a:latin typeface="Open Sauce"/>
-                <a:ea typeface="Open Sauce"/>
-                <a:cs typeface="Open Sauce"/>
-                <a:sym typeface="Open Sauce"/>
-              </a:rPr>
-              <a:t>s</a:t>
-            </a:r>
-            <a:r>
-              <a:rPr lang="en-US" sz="2100" strike="noStrike" u="none">
-                <a:solidFill>
-                  <a:srgbClr val="331B0D"/>
-                </a:solidFill>
-                <a:latin typeface="Open Sauce"/>
-                <a:ea typeface="Open Sauce"/>
-                <a:cs typeface="Open Sauce"/>
-                <a:sym typeface="Open Sauce"/>
-              </a:rPr>
-              <a:t>es</a:t>
+              <a:t>e implantação em ambiente de produção.</a:t>
             </a:r>
           </a:p>
         </p:txBody>
